--- a/Presentación Casuística - VARGAS PABLO Pedro Emilio.pptx
+++ b/Presentación Casuística - VARGAS PABLO Pedro Emilio.pptx
@@ -3473,6 +3473,46 @@
           </a:p>
         </p:txBody>
       </p:sp>
+      <p:sp>
+        <p:nvSpPr>
+          <p:cNvPr id="10" name="TextBox 4"/>
+          <p:cNvSpPr txBox="1"/>
+          <p:nvPr/>
+        </p:nvSpPr>
+        <p:spPr>
+          <a:xfrm>
+            <a:off x="822960" y="3944121"/>
+            <a:ext cx="8961120" cy="578620"/>
+          </a:xfrm>
+          <a:prstGeom prst="rect">
+            <a:avLst/>
+          </a:prstGeom>
+          <a:noFill/>
+        </p:spPr>
+        <p:txBody>
+          <a:bodyPr wrap="square" lIns="36576" tIns="27432" rIns="36576" bIns="27432">
+            <a:spAutoFit/>
+          </a:bodyPr>
+          <a:lstStyle/>
+          <a:p>
+            <a:r>
+              <a:rPr lang="es-PE" sz="1700" b="1" dirty="0">
+                <a:solidFill>
+                  <a:srgbClr val="FF0000"/>
+                </a:solidFill>
+                <a:latin typeface="Aptos"/>
+              </a:rPr>
+              <a:t>GITHUB: https://github.com/pedro5434/AgenteConversacionalInteligente_VargasPablo</a:t>
+            </a:r>
+            <a:endParaRPr lang="es-PE" sz="1700" b="1" dirty="0" smtClean="0">
+              <a:solidFill>
+                <a:srgbClr val="FF0000"/>
+              </a:solidFill>
+              <a:latin typeface="Aptos"/>
+            </a:endParaRPr>
+          </a:p>
+        </p:txBody>
+      </p:sp>
     </p:spTree>
   </p:cSld>
   <p:clrMapOvr>
@@ -6900,25 +6940,7 @@
                 </a:solidFill>
                 <a:latin typeface="Aptos"/>
               </a:rPr>
-              <a:t>Tools </a:t>
-            </a:r>
-            <a:r>
-              <a:rPr lang="es-PE" sz="2800" b="1" dirty="0" smtClean="0">
-                <a:solidFill>
-                  <a:srgbClr val="182B46"/>
-                </a:solidFill>
-                <a:latin typeface="Aptos"/>
-              </a:rPr>
-              <a:t>y Funcionalidades MCP implementados </a:t>
-            </a:r>
-            <a:r>
-              <a:rPr lang="es-PE" sz="2800" b="1" dirty="0" smtClean="0">
-                <a:solidFill>
-                  <a:srgbClr val="182B46"/>
-                </a:solidFill>
-                <a:latin typeface="Aptos"/>
-              </a:rPr>
-              <a:t>para el Agente</a:t>
+              <a:t>Tools y Funcionalidades MCP implementados para el Agente</a:t>
             </a:r>
             <a:endParaRPr sz="2800" b="1" dirty="0">
               <a:solidFill>
